--- a/public/materialy/1L/7/Prezentace k hodinám/10. Závěrečná bezpečnostní výzva.pptx
+++ b/public/materialy/1L/7/Prezentace k hodinám/10. Závěrečná bezpečnostní výzva.pptx
@@ -548,7 +548,7 @@
           </a:p>
           <a:p xmlns:a="http://schemas.openxmlformats.org/drawingml/2006/main">
             <a:r>
-              <a:t>Soubory: 10_incident_medialniho_klubu.html, Internet_bezpecnost_testy_A_B.docx, pracovní sešit V4</a:t>
+              <a:t>Soubory: 10. Incident mediálního klubu.html, Testy A a B.docx, pracovní sešit V4</a:t>
             </a:r>
           </a:p>
           <a:p xmlns:a="http://schemas.openxmlformats.org/drawingml/2006/main">
@@ -808,7 +808,7 @@
           <a:lstStyle xmlns:a="http://schemas.openxmlformats.org/drawingml/2006/main"/>
           <a:p xmlns:a="http://schemas.openxmlformats.org/drawingml/2006/main">
             <a:r>
-              <a:t>Hlavní aktivita využívá: 10_incident_medialniho_klubu.html, Internet_bezpecnost_testy_A_B.docx, pracovní sešit V4</a:t>
+              <a:t>Hlavní aktivita využívá: 10. Incident mediálního klubu.html, Testy A a B.docx, pracovní sešit V4</a:t>
             </a:r>
           </a:p>
           <a:p xmlns:a="http://schemas.openxmlformats.org/drawingml/2006/main">
@@ -3480,7 +3480,7 @@
               </a:defRPr>
             </a:pPr>
             <a:r>
-              <a:t>10_incident_medialniho_klubu.html, Internet_bezpecnost_testy_A_B.docx, pracovní sešit V4</a:t>
+              <a:t>10. Incident mediálního klubu.html, Testy A a B.docx, pracovní sešit V4</a:t>
             </a:r>
           </a:p>
         </p:txBody>

--- a/public/materialy/1L/7/Prezentace k hodinám/10. Závěrečná bezpečnostní výzva.pptx
+++ b/public/materialy/1L/7/Prezentace k hodinám/10. Závěrečná bezpečnostní výzva.pptx
@@ -3480,7 +3480,7 @@
               </a:defRPr>
             </a:pPr>
             <a:r>
-              <a:t>10. Incident mediálního klubu.html, Testy A a B.docx, pracovní sešit V4</a:t>
+              <a:t>10. Incident mediálního klubu.html, Testy A a B.docx, digitální pracovní sešit</a:t>
             </a:r>
           </a:p>
         </p:txBody>

--- a/public/materialy/1L/7/Prezentace k hodinám/10. Závěrečná bezpečnostní výzva.pptx
+++ b/public/materialy/1L/7/Prezentace k hodinám/10. Závěrečná bezpečnostní výzva.pptx
@@ -558,7 +558,7 @@
           </a:p>
           <a:p xmlns:a="http://schemas.openxmlformats.org/drawingml/2006/main">
             <a:r>
-              <a:t>Před otevřením dalšího snímku stručně uveďte téma a nechte studenty připravit pracovní soubory.</a:t>
+              <a:t>Před otevřením dalšího snímku stručně uveď téma a nech studenty připravit pracovní soubory.</a:t>
             </a:r>
           </a:p>
         </p:txBody>
@@ -638,7 +638,7 @@
           </a:p>
           <a:p xmlns:a="http://schemas.openxmlformats.org/drawingml/2006/main">
             <a:r>
-              <a:t>Postup učitele: Ověřte porozumění situaci, ale nenaznačujte pořadí řešení.</a:t>
+              <a:t>Postup učitele: Ověř porozumění situaci, ale nenaznačuj pořadí řešení.</a:t>
             </a:r>
           </a:p>
           <a:p xmlns:a="http://schemas.openxmlformats.org/drawingml/2006/main">
@@ -648,7 +648,7 @@
           </a:p>
           <a:p xmlns:a="http://schemas.openxmlformats.org/drawingml/2006/main">
             <a:r>
-              <a:t>Neprozrazujte správnou odpověď. Cílem je zachytit počáteční úsudek, ke kterému se třída vrátí při reflexi.</a:t>
+              <a:t>Neprozrazuj správnou odpověď. Cílem je zachytit počáteční úsudek, ke kterému se třída vrátí při reflexi.</a:t>
             </a:r>
           </a:p>
         </p:txBody>
@@ -738,7 +738,7 @@
           </a:p>
           <a:p xmlns:a="http://schemas.openxmlformats.org/drawingml/2006/main">
             <a:r>
-              <a:t>Nechte studenty doplnit příklad ke každému bodu. Přechod k aktivitě proveďte otázkou: Jak tyto tři body použijeme na dnešní soubor?</a:t>
+              <a:t>Nech studenty doplnit příklad ke každému bodu. Přechod k aktivitě proveď otázkou: Jak tyto tři body použijeme na dnešní soubor?</a:t>
             </a:r>
           </a:p>
         </p:txBody>
@@ -818,7 +818,7 @@
           </a:p>
           <a:p xmlns:a="http://schemas.openxmlformats.org/drawingml/2006/main">
             <a:r>
-              <a:t>20–25 min – Akční plán: Nechte týmy seřadit pět prvních kroků a označit vlastníka každého kroku.</a:t>
+              <a:t>20–25 min – Akční plán: Nech týmy seřadit pět prvních kroků a označit vlastníka každého kroku.</a:t>
             </a:r>
           </a:p>
           <a:p xmlns:a="http://schemas.openxmlformats.org/drawingml/2006/main">
@@ -833,7 +833,7 @@
           </a:p>
           <a:p xmlns:a="http://schemas.openxmlformats.org/drawingml/2006/main">
             <a:r>
-              <a:t>Během práce nepřebírejte myš za studenta. Pomáhejte otázkami z dalšího snímku a žádejte, aby každé rozhodnutí opřel o konkrétní znak nebo zdroj.</a:t>
+              <a:t>Během práce nepřebírej myš za studenta. Pomáhej otázkami z dalšího snímku a žádej, aby každé rozhodnutí opřel o konkrétní znak nebo zdroj.</a:t>
             </a:r>
           </a:p>
         </p:txBody>
@@ -913,7 +913,7 @@
           </a:p>
           <a:p xmlns:a="http://schemas.openxmlformats.org/drawingml/2006/main">
             <a:r>
-              <a:t>Podpora: Nabídněte pět nadpisů stanovišť, ale ne pořadí kroků; tým pod ně třídí zjištění z dashboardu.</a:t>
+              <a:t>Podpora: Nabídni pět nadpisů stanovišť, ale ne pořadí kroků; tým pod ně třídí zjištění z dashboardu.</a:t>
             </a:r>
           </a:p>
           <a:p xmlns:a="http://schemas.openxmlformats.org/drawingml/2006/main">
@@ -923,7 +923,7 @@
           </a:p>
           <a:p xmlns:a="http://schemas.openxmlformats.org/drawingml/2006/main">
             <a:r>
-              <a:t>Pro rychlou mezikontrolu nechte dvojice vyměnit výstup a označit jeden dobře doložený bod a jednu otázku, která ještě zůstává.</a:t>
+              <a:t>Pro rychlou mezikontrolu nech dvojice vyměnit výstup a označit jeden dobře doložený bod a jednu otázku, která ještě zůstává.</a:t>
             </a:r>
           </a:p>
         </p:txBody>
@@ -998,12 +998,12 @@
           </a:p>
           <a:p xmlns:a="http://schemas.openxmlformats.org/drawingml/2006/main">
             <a:r>
-              <a:t>Časté chyby a intervence: Tým nejprve píše veřejné vysvětlení. → Nejdřív zastavte další škodu a obnovte kontrolu nad účtem. | Důkaz se přeposílá celé třídě. → Uchovejte minimum v řízeném kanálu; další šíření může zvyšovat újmu a porušovat soukromí. | Tým řeší pouze phishing. → Dashboard kombinuje zabezpečení účtu, ověřování informací, soukromí i autorská práva.</a:t>
-            </a:r>
-          </a:p>
-          <a:p xmlns:a="http://schemas.openxmlformats.org/drawingml/2006/main">
-            <a:r>
-              <a:t>Nečtěte celý klíč. Vyberte dva studentské postupy, které vedou k odlišným závěrům, a nechte třídu určit, který je lépe podložený.</a:t>
+              <a:t>Časté chyby a intervence: Tým nejprve píše veřejné vysvětlení. → Nejdřív zastav další škodu a obnov kontrolu nad účtem. | Důkaz se přeposílá celé třídě. → Uchovej minimum v řízeném kanálu; další šíření může zvyšovat újmu a porušovat soukromí. | Tým řeší pouze phishing. → Dashboard kombinuje zabezpečení účtu, ověřování informací, soukromí i autorská práva.</a:t>
+            </a:r>
+          </a:p>
+          <a:p xmlns:a="http://schemas.openxmlformats.org/drawingml/2006/main">
+            <a:r>
+              <a:t>Nečti celý klíč. Vyber dva studentské postupy, které vedou k odlišným závěrům, a nech třídu určit, který je lépe podložený.</a:t>
             </a:r>
           </a:p>
         </p:txBody>
@@ -1078,7 +1078,7 @@
           </a:p>
           <a:p xmlns:a="http://schemas.openxmlformats.org/drawingml/2006/main">
             <a:r>
-              <a:t>Podpora: Nabídněte pět nadpisů stanovišť, ale ne pořadí kroků; tým pod ně třídí zjištění z dashboardu.</a:t>
+              <a:t>Podpora: Nabídni pět nadpisů stanovišť, ale ne pořadí kroků; tým pod ně třídí zjištění z dashboardu.</a:t>
             </a:r>
           </a:p>
           <a:p xmlns:a="http://schemas.openxmlformats.org/drawingml/2006/main">
@@ -1088,12 +1088,12 @@
           </a:p>
           <a:p xmlns:a="http://schemas.openxmlformats.org/drawingml/2006/main">
             <a:r>
-              <a:t>Když technika selže: Dashboard je offline. Pokud nefunguje prohlížeč, použijte časovou osu a popis incidentu z pracovního sešitu.</a:t>
-            </a:r>
-          </a:p>
-          <a:p xmlns:a="http://schemas.openxmlformats.org/drawingml/2006/main">
-            <a:r>
-              <a:t>Vyberte způsob odevzdání předem. Odpověď použijte jako diagnostiku pro začátek další hodiny; nehodnoťte pouze formální správnost, ale konkrétnost a zdůvodnění.</a:t>
+              <a:t>Když technika selže: Dashboard je offline. Pokud nefunguje prohlížeč, použij časovou osu a popis incidentu z pracovního sešitu.</a:t>
+            </a:r>
+          </a:p>
+          <a:p xmlns:a="http://schemas.openxmlformats.org/drawingml/2006/main">
+            <a:r>
+              <a:t>Vyber způsob odevzdání předem. Odpověď použij jako diagnostiku pro začátek další hodiny; nehodnoť pouze formální správnost, ale konkrétnost a zdůvodnění.</a:t>
             </a:r>
           </a:p>
         </p:txBody>

--- a/public/materialy/1L/7/Prezentace k hodinám/10. Závěrečná bezpečnostní výzva.pptx
+++ b/public/materialy/1L/7/Prezentace k hodinám/10. Závěrečná bezpečnostní výzva.pptx
@@ -548,7 +548,7 @@
           </a:p>
           <a:p xmlns:a="http://schemas.openxmlformats.org/drawingml/2006/main">
             <a:r>
-              <a:t>Soubory: 10. Incident mediálního klubu.html, Testy A a B.docx, pracovní sešit V4</a:t>
+              <a:t>Soubory: Incident mediálního klubu.html, Testy A a B.docx, pracovní sešit V4</a:t>
             </a:r>
           </a:p>
           <a:p xmlns:a="http://schemas.openxmlformats.org/drawingml/2006/main">
@@ -808,7 +808,7 @@
           <a:lstStyle xmlns:a="http://schemas.openxmlformats.org/drawingml/2006/main"/>
           <a:p xmlns:a="http://schemas.openxmlformats.org/drawingml/2006/main">
             <a:r>
-              <a:t>Hlavní aktivita využívá: 10. Incident mediálního klubu.html, Testy A a B.docx, pracovní sešit V4</a:t>
+              <a:t>Hlavní aktivita využívá: Incident mediálního klubu.html, Testy A a B.docx, pracovní sešit V4</a:t>
             </a:r>
           </a:p>
           <a:p xmlns:a="http://schemas.openxmlformats.org/drawingml/2006/main">
@@ -3480,7 +3480,7 @@
               </a:defRPr>
             </a:pPr>
             <a:r>
-              <a:t>10. Incident mediálního klubu.html, Testy A a B.docx, digitální pracovní sešit</a:t>
+              <a:t>Incident mediálního klubu.html, Testy A a B.docx, digitální pracovní sešit</a:t>
             </a:r>
           </a:p>
         </p:txBody>

--- a/public/materialy/1L/7/Prezentace k hodinám/10. Závěrečná bezpečnostní výzva.pptx
+++ b/public/materialy/1L/7/Prezentace k hodinám/10. Závěrečná bezpečnostní výzva.pptx
@@ -543,22 +543,22 @@
           <a:lstStyle xmlns:a="http://schemas.openxmlformats.org/drawingml/2006/main"/>
           <a:p xmlns:a="http://schemas.openxmlformats.org/drawingml/2006/main">
             <a:r>
-              <a:t>Výukový cíl: Student v týmu stanoví priority při kombinovaném incidentu a následně samostatně prokáže zvládnutí celého bloku.</a:t>
-            </a:r>
-          </a:p>
-          <a:p xmlns:a="http://schemas.openxmlformats.org/drawingml/2006/main">
-            <a:r>
-              <a:t>Soubory: Incident mediálního klubu.html, Testy A a B.docx, pracovní sešit V4</a:t>
-            </a:r>
-          </a:p>
-          <a:p xmlns:a="http://schemas.openxmlformats.org/drawingml/2006/main">
-            <a:r>
-              <a:t>Výstup: Týmový akční plán k incidentu, individuální test a závěrečné sebehodnocení.</a:t>
-            </a:r>
-          </a:p>
-          <a:p xmlns:a="http://schemas.openxmlformats.org/drawingml/2006/main">
-            <a:r>
-              <a:t>Před otevřením dalšího snímku stručně uveď téma a nech studenty připravit pracovní soubory.</a:t>
+              <a:t>Výukový cíl: Student v týmu stanoví priority při kombinovaném incidentu a následně samostatně prokáže zvládnutí celého bloku.</a:t>
+            </a:r>
+          </a:p>
+          <a:p xmlns:a="http://schemas.openxmlformats.org/drawingml/2006/main">
+            <a:r>
+              <a:t>Soubory: Incident mediálního klubu.html, Testy A a B.docx, pracovní sešit V4</a:t>
+            </a:r>
+          </a:p>
+          <a:p xmlns:a="http://schemas.openxmlformats.org/drawingml/2006/main">
+            <a:r>
+              <a:t>Výstup: Týmový akční plán k incidentu, individuální test a závěrečné sebehodnocení.</a:t>
+            </a:r>
+          </a:p>
+          <a:p xmlns:a="http://schemas.openxmlformats.org/drawingml/2006/main">
+            <a:r>
+              <a:t>Před otevřením dalšího snímku stručně uveď téma a nech studenty připravit pracovní soubory.</a:t>
             </a:r>
           </a:p>
         </p:txBody>
@@ -633,7 +633,7 @@
           </a:p>
           <a:p xmlns:a="http://schemas.openxmlformats.org/drawingml/2006/main">
             <a:r>
-              <a:t>Činnost: Zadání a role.</a:t>
+              <a:t>Činnost: Zadání a role.</a:t>
             </a:r>
           </a:p>
           <a:p xmlns:a="http://schemas.openxmlformats.org/drawingml/2006/main">
@@ -643,7 +643,7 @@
           </a:p>
           <a:p xmlns:a="http://schemas.openxmlformats.org/drawingml/2006/main">
             <a:r>
-              <a:t>Otázka pro studenty: Účet, nepravdivý příspěvek a osobní údaje: co řešit nejdřív?</a:t>
+              <a:t>Otázka pro studenty: Účet, nepravdivý příspěvek a osobní údaje: co řešit nejdřív?</a:t>
             </a:r>
           </a:p>
           <a:p xmlns:a="http://schemas.openxmlformats.org/drawingml/2006/main">
@@ -728,17 +728,17 @@
           </a:p>
           <a:p xmlns:a="http://schemas.openxmlformats.org/drawingml/2006/main">
             <a:r>
-              <a:t>Postup učitele: Týmy řeší účet, příspěvek, soukromí, důkazy a autorská práva.</a:t>
-            </a:r>
-          </a:p>
-          <a:p xmlns:a="http://schemas.openxmlformats.org/drawingml/2006/main">
-            <a:r>
-              <a:t>Klíčové závěry: První reakce: Nahlásit incident, omezit přístup, zabezpečit účet a uchovat pouze nezbytné důkazy. | Účty: Změnit hesla všech služeb se stejným heslem, zrušit neznámé relace, zkontrolovat obnovu a zapnout 2FA. | Příspěvek: Ověřit tvrzení, odstranit nebo opravit nepravdivý obsah, transparentně informovat publikum a uchovat záznam.</a:t>
-            </a:r>
-          </a:p>
-          <a:p xmlns:a="http://schemas.openxmlformats.org/drawingml/2006/main">
-            <a:r>
-              <a:t>Nech studenty doplnit příklad ke každému bodu. Přechod k aktivitě proveď otázkou: Jak tyto tři body použijeme na dnešní soubor?</a:t>
+              <a:t>Postup učitele: Týmy řeší účet, příspěvek, soukromí, důkazy a autorská práva.</a:t>
+            </a:r>
+          </a:p>
+          <a:p xmlns:a="http://schemas.openxmlformats.org/drawingml/2006/main">
+            <a:r>
+              <a:t>Klíčové závěry: První reakce: Nahlásit incident, omezit přístup, zabezpečit účet a uchovat pouze nezbytné důkazy. | Účty: Změnit hesla všech služeb se stejným heslem, zrušit neznámé relace, zkontrolovat obnovu a zapnout 2FA. | Příspěvek: Ověřit tvrzení, odstranit nebo opravit nepravdivý obsah, transparentně informovat publikum a uchovat záznam.</a:t>
+            </a:r>
+          </a:p>
+          <a:p xmlns:a="http://schemas.openxmlformats.org/drawingml/2006/main">
+            <a:r>
+              <a:t>Nech studenty doplnit příklad ke každému bodu. Přechod k aktivitě proveď otázkou: Jak tyto tři body použijeme na dnešní soubor?</a:t>
             </a:r>
           </a:p>
         </p:txBody>
@@ -808,32 +808,32 @@
           <a:lstStyle xmlns:a="http://schemas.openxmlformats.org/drawingml/2006/main"/>
           <a:p xmlns:a="http://schemas.openxmlformats.org/drawingml/2006/main">
             <a:r>
-              <a:t>Hlavní aktivita využívá: Incident mediálního klubu.html, Testy A a B.docx, pracovní sešit V4</a:t>
-            </a:r>
-          </a:p>
-          <a:p xmlns:a="http://schemas.openxmlformats.org/drawingml/2006/main">
-            <a:r>
-              <a:t>5–20 min – Analýza dashboardu: Týmy řeší účet, příspěvek, soukromí, důkazy a autorská práva.</a:t>
-            </a:r>
-          </a:p>
-          <a:p xmlns:a="http://schemas.openxmlformats.org/drawingml/2006/main">
-            <a:r>
-              <a:t>20–25 min – Akční plán: Nech týmy seřadit pět prvních kroků a označit vlastníka každého kroku.</a:t>
-            </a:r>
-          </a:p>
-          <a:p xmlns:a="http://schemas.openxmlformats.org/drawingml/2006/main">
-            <a:r>
-              <a:t>25–37 min – Individuální test A/B: Studenti pracují bez pracovního sešitu a bez týmové pomoci.</a:t>
-            </a:r>
-          </a:p>
-          <a:p xmlns:a="http://schemas.openxmlformats.org/drawingml/2006/main">
-            <a:r>
-              <a:t>Požadovaný výstup: Týmový akční plán k incidentu, individuální test a závěrečné sebehodnocení.</a:t>
-            </a:r>
-          </a:p>
-          <a:p xmlns:a="http://schemas.openxmlformats.org/drawingml/2006/main">
-            <a:r>
-              <a:t>Během práce nepřebírej myš za studenta. Pomáhej otázkami z dalšího snímku a žádej, aby každé rozhodnutí opřel o konkrétní znak nebo zdroj.</a:t>
+              <a:t>Hlavní aktivita využívá: Incident mediálního klubu.html, Testy A a B.docx, pracovní sešit V4</a:t>
+            </a:r>
+          </a:p>
+          <a:p xmlns:a="http://schemas.openxmlformats.org/drawingml/2006/main">
+            <a:r>
+              <a:t>5–20 min – Analýza dashboardu: Týmy řeší účet, příspěvek, soukromí, důkazy a autorská práva.</a:t>
+            </a:r>
+          </a:p>
+          <a:p xmlns:a="http://schemas.openxmlformats.org/drawingml/2006/main">
+            <a:r>
+              <a:t>20–25 min – Akční plán: Nech týmy seřadit pět prvních kroků a označit vlastníka každého kroku.</a:t>
+            </a:r>
+          </a:p>
+          <a:p xmlns:a="http://schemas.openxmlformats.org/drawingml/2006/main">
+            <a:r>
+              <a:t>25–37 min – Individuální test A/B: Studenti pracují bez pracovního sešitu a bez týmové pomoci.</a:t>
+            </a:r>
+          </a:p>
+          <a:p xmlns:a="http://schemas.openxmlformats.org/drawingml/2006/main">
+            <a:r>
+              <a:t>Požadovaný výstup: Týmový akční plán k incidentu, individuální test a závěrečné sebehodnocení.</a:t>
+            </a:r>
+          </a:p>
+          <a:p xmlns:a="http://schemas.openxmlformats.org/drawingml/2006/main">
+            <a:r>
+              <a:t>Během práce nepřebírej myš za studenta. Pomáhej otázkami z dalšího snímku a žádej, aby každé rozhodnutí opřel o konkrétní znak nebo zdroj.</a:t>
             </a:r>
           </a:p>
         </p:txBody>
@@ -903,27 +903,27 @@
           <a:lstStyle xmlns:a="http://schemas.openxmlformats.org/drawingml/2006/main"/>
           <a:p xmlns:a="http://schemas.openxmlformats.org/drawingml/2006/main">
             <a:r>
-              <a:t>Kritérium úspěchu: Tým nejprve omezí škodu a zabezpečí účty; jednotlivec v testu získá podle zvolené hranice alespoň 45 %.</a:t>
-            </a:r>
-          </a:p>
-          <a:p xmlns:a="http://schemas.openxmlformats.org/drawingml/2006/main">
-            <a:r>
-              <a:t>Vodicí otázky: Který krok musí proběhnout dřív, aby se škoda dále nezvětšovala? | Které důkazy je vhodné uchovat a které citlivé údaje nesmíme dále šířit? | Jaká změna procesu zabrání opakování, i když člověk znovu udělá chybu?</a:t>
-            </a:r>
-          </a:p>
-          <a:p xmlns:a="http://schemas.openxmlformats.org/drawingml/2006/main">
-            <a:r>
-              <a:t>Podpora: Nabídni pět nadpisů stanovišť, ale ne pořadí kroků; tým pod ně třídí zjištění z dashboardu.</a:t>
-            </a:r>
-          </a:p>
-          <a:p xmlns:a="http://schemas.openxmlformats.org/drawingml/2006/main">
-            <a:r>
-              <a:t>Rozšíření: Tým sestaví krátké hlášení incidentu pro vedení školy: co se stalo, dopad, provedené kroky a prevence.</a:t>
-            </a:r>
-          </a:p>
-          <a:p xmlns:a="http://schemas.openxmlformats.org/drawingml/2006/main">
-            <a:r>
-              <a:t>Pro rychlou mezikontrolu nech dvojice vyměnit výstup a označit jeden dobře doložený bod a jednu otázku, která ještě zůstává.</a:t>
+              <a:t>Kritérium úspěchu: Tým nejprve omezí škodu a zabezpečí účty; jednotlivec v testu získá podle zvolené hranice alespoň 45 %.</a:t>
+            </a:r>
+          </a:p>
+          <a:p xmlns:a="http://schemas.openxmlformats.org/drawingml/2006/main">
+            <a:r>
+              <a:t>Vodicí otázky: Který krok musí proběhnout dřív, aby se škoda dále nezvětšovala? | Které důkazy je vhodné uchovat a které citlivé údaje nesmíme dále šířit? | Jaká změna procesu zabrání opakování, i když člověk znovu udělá chybu?</a:t>
+            </a:r>
+          </a:p>
+          <a:p xmlns:a="http://schemas.openxmlformats.org/drawingml/2006/main">
+            <a:r>
+              <a:t>Podpora: Nabídni pět nadpisů stanovišť, ale ne pořadí kroků; tým pod ně třídí zjištění z dashboardu.</a:t>
+            </a:r>
+          </a:p>
+          <a:p xmlns:a="http://schemas.openxmlformats.org/drawingml/2006/main">
+            <a:r>
+              <a:t>Rozšíření: Tým sestaví krátké hlášení incidentu pro vedení školy: co se stalo, dopad, provedené kroky a prevence.</a:t>
+            </a:r>
+          </a:p>
+          <a:p xmlns:a="http://schemas.openxmlformats.org/drawingml/2006/main">
+            <a:r>
+              <a:t>Pro rychlou mezikontrolu nech dvojice vyměnit výstup a označit jeden dobře doložený bod a jednu otázku, která ještě zůstává.</a:t>
             </a:r>
           </a:p>
         </p:txBody>
@@ -993,17 +993,17 @@
           <a:lstStyle xmlns:a="http://schemas.openxmlformats.org/drawingml/2006/main"/>
           <a:p xmlns:a="http://schemas.openxmlformats.org/drawingml/2006/main">
             <a:r>
-              <a:t>Očekávané závěry: První reakce: Nahlásit incident, omezit přístup, zabezpečit účet a uchovat pouze nezbytné důkazy. | Účty: Změnit hesla všech služeb se stejným heslem, zrušit neznámé relace, zkontrolovat obnovu a zapnout 2FA. | Příspěvek: Ověřit tvrzení, odstranit nebo opravit nepravdivý obsah, transparentně informovat publikum a uchovat záznam. | Soukromí: Odstranit zveřejněné osobní údaje, informovat dotčené osoby a školu a upravit schvalovací proces. | Autorská práva: Ověřit licenci hudby; použít vlastní nebo řádně licencovaný obsah s požadovaným uvedením. | Prevence: Unikátní hesla, 2FA, více správců s omezenými rolemi, schvalování příspěvků a známý ohlašovací kanál.</a:t>
-            </a:r>
-          </a:p>
-          <a:p xmlns:a="http://schemas.openxmlformats.org/drawingml/2006/main">
-            <a:r>
-              <a:t>Časté chyby a intervence: Tým nejprve píše veřejné vysvětlení. → Nejdřív zastav další škodu a obnov kontrolu nad účtem. | Důkaz se přeposílá celé třídě. → Uchovej minimum v řízeném kanálu; další šíření může zvyšovat újmu a porušovat soukromí. | Tým řeší pouze phishing. → Dashboard kombinuje zabezpečení účtu, ověřování informací, soukromí i autorská práva.</a:t>
-            </a:r>
-          </a:p>
-          <a:p xmlns:a="http://schemas.openxmlformats.org/drawingml/2006/main">
-            <a:r>
-              <a:t>Nečti celý klíč. Vyber dva studentské postupy, které vedou k odlišným závěrům, a nech třídu určit, který je lépe podložený.</a:t>
+              <a:t>Očekávané závěry: První reakce: Nahlásit incident, omezit přístup, zabezpečit účet a uchovat pouze nezbytné důkazy. | Účty: Změnit hesla všech služeb se stejným heslem, zrušit neznámé relace, zkontrolovat obnovu a zapnout 2FA. | Příspěvek: Ověřit tvrzení, odstranit nebo opravit nepravdivý obsah, transparentně informovat publikum a uchovat záznam. | Soukromí: Odstranit zveřejněné osobní údaje, informovat dotčené osoby a školu a upravit schvalovací proces. | Autorská práva: Ověřit licenci hudby; použít vlastní nebo řádně licencovaný obsah s požadovaným uvedením. | Prevence: Unikátní hesla, 2FA, více správců s omezenými rolemi, schvalování příspěvků a známý ohlašovací kanál.</a:t>
+            </a:r>
+          </a:p>
+          <a:p xmlns:a="http://schemas.openxmlformats.org/drawingml/2006/main">
+            <a:r>
+              <a:t>Časté chyby a intervence: Tým nejprve píše veřejné vysvětlení. → Nejdřív zastav další škodu a obnov kontrolu nad účtem. | Důkaz se přeposílá celé třídě. → Uchovej minimum v řízeném kanálu; další šíření může zvyšovat újmu a porušovat soukromí. | Tým řeší pouze phishing. → Dashboard kombinuje zabezpečení účtu, ověřování informací, soukromí i autorská práva.</a:t>
+            </a:r>
+          </a:p>
+          <a:p xmlns:a="http://schemas.openxmlformats.org/drawingml/2006/main">
+            <a:r>
+              <a:t>Nečti celý klíč. Vyber dva studentské postupy, které vedou k odlišným závěrům, a nech třídu určit, který je lépe podložený.</a:t>
             </a:r>
           </a:p>
         </p:txBody>
@@ -1073,27 +1073,27 @@
           <a:lstStyle xmlns:a="http://schemas.openxmlformats.org/drawingml/2006/main"/>
           <a:p xmlns:a="http://schemas.openxmlformats.org/drawingml/2006/main">
             <a:r>
-              <a:t>Exit ticket: Napiš jednu změnu procesu, která sníží dopad budoucí lidské chyby, a jedno téma, které si potřebuješ procvičit.</a:t>
-            </a:r>
-          </a:p>
-          <a:p xmlns:a="http://schemas.openxmlformats.org/drawingml/2006/main">
-            <a:r>
-              <a:t>Podpora: Nabídni pět nadpisů stanovišť, ale ne pořadí kroků; tým pod ně třídí zjištění z dashboardu.</a:t>
-            </a:r>
-          </a:p>
-          <a:p xmlns:a="http://schemas.openxmlformats.org/drawingml/2006/main">
-            <a:r>
-              <a:t>Rozšíření: Tým sestaví krátké hlášení incidentu pro vedení školy: co se stalo, dopad, provedené kroky a prevence.</a:t>
-            </a:r>
-          </a:p>
-          <a:p xmlns:a="http://schemas.openxmlformats.org/drawingml/2006/main">
-            <a:r>
-              <a:t>Když technika selže: Dashboard je offline. Pokud nefunguje prohlížeč, použij časovou osu a popis incidentu z pracovního sešitu.</a:t>
-            </a:r>
-          </a:p>
-          <a:p xmlns:a="http://schemas.openxmlformats.org/drawingml/2006/main">
-            <a:r>
-              <a:t>Vyber způsob odevzdání předem. Odpověď použij jako diagnostiku pro začátek další hodiny; nehodnoť pouze formální správnost, ale konkrétnost a zdůvodnění.</a:t>
+              <a:t>Exit ticket: Napiš jednu změnu procesu, která sníží dopad budoucí lidské chyby, a jedno téma, které si potřebuješ procvičit.</a:t>
+            </a:r>
+          </a:p>
+          <a:p xmlns:a="http://schemas.openxmlformats.org/drawingml/2006/main">
+            <a:r>
+              <a:t>Podpora: Nabídni pět nadpisů stanovišť, ale ne pořadí kroků; tým pod ně třídí zjištění z dashboardu.</a:t>
+            </a:r>
+          </a:p>
+          <a:p xmlns:a="http://schemas.openxmlformats.org/drawingml/2006/main">
+            <a:r>
+              <a:t>Rozšíření: Tým sestaví krátké hlášení incidentu pro vedení školy: co se stalo, dopad, provedené kroky a prevence.</a:t>
+            </a:r>
+          </a:p>
+          <a:p xmlns:a="http://schemas.openxmlformats.org/drawingml/2006/main">
+            <a:r>
+              <a:t>Když technika selže: Dashboard je offline. Pokud nefunguje prohlížeč, použij časovou osu a popis incidentu z pracovního sešitu.</a:t>
+            </a:r>
+          </a:p>
+          <a:p xmlns:a="http://schemas.openxmlformats.org/drawingml/2006/main">
+            <a:r>
+              <a:t>Vyber způsob odevzdání předem. Odpověď použij jako diagnostiku pro začátek další hodiny; nehodnoť pouze formální správnost, ale konkrétnost a zdůvodnění.</a:t>
             </a:r>
           </a:p>
         </p:txBody>
@@ -1824,7 +1824,7 @@
             </a:pPr>
             <a:r>
               <a:t>INTERNET, BEZPEČNOST
-A PRÁCE S INFORMACEMI</a:t>
+A PRÁCE S INFORMACEMI</a:t>
             </a:r>
           </a:p>
         </p:txBody>
@@ -1914,7 +1914,7 @@
               </a:defRPr>
             </a:pPr>
             <a:r>
-              <a:t>Student v týmu stanoví priority při kombinovaném incidentu a následně samostatně prokáže zvládnutí celého bloku.</a:t>
+              <a:t>Student v týmu stanoví priority při kombinovaném incidentu a následně samostatně prokáže zvládnutí celého bloku.</a:t>
             </a:r>
           </a:p>
         </p:txBody>
@@ -2382,7 +2382,7 @@
               </a:defRPr>
             </a:pPr>
             <a:r>
-              <a:t>Účet, nepravdivý příspěvek a osobní údaje: co řešit nejdřív?</a:t>
+              <a:t>Účet, nepravdivý příspěvek a osobní údaje: co řešit nejdřív?</a:t>
             </a:r>
           </a:p>
         </p:txBody>
@@ -2759,7 +2759,7 @@
               </a:defRPr>
             </a:pPr>
             <a:r>
-              <a:t>Účet a přístup</a:t>
+              <a:t>Účet a přístup</a:t>
             </a:r>
           </a:p>
         </p:txBody>
@@ -2804,7 +2804,7 @@
               </a:defRPr>
             </a:pPr>
             <a:r>
-              <a:t>Zjisti, které účty a relace jsou zasažené, co se změnilo a kdo má oprávnění zasáhnout.</a:t>
+              <a:t>Zjisti, které účty a relace jsou zasažené, co se změnilo a kdo má oprávnění zasáhnout.</a:t>
             </a:r>
           </a:p>
         </p:txBody>
@@ -2894,7 +2894,7 @@
               </a:defRPr>
             </a:pPr>
             <a:r>
-              <a:t>Obsah a soukromí</a:t>
+              <a:t>Obsah a soukromí</a:t>
             </a:r>
           </a:p>
         </p:txBody>
@@ -2939,7 +2939,7 @@
               </a:defRPr>
             </a:pPr>
             <a:r>
-              <a:t>Odděl nepravdivý obsah, zveřejněné osobní údaje a důkazy, které je nutné uchovat.</a:t>
+              <a:t>Odděl nepravdivý obsah, zveřejněné osobní údaje a důkazy, které je nutné uchovat.</a:t>
             </a:r>
           </a:p>
         </p:txBody>
@@ -3029,7 +3029,7 @@
               </a:defRPr>
             </a:pPr>
             <a:r>
-              <a:t>Práva a prevence</a:t>
+              <a:t>Práva a prevence</a:t>
             </a:r>
           </a:p>
         </p:txBody>
@@ -3074,7 +3074,7 @@
               </a:defRPr>
             </a:pPr>
             <a:r>
-              <a:t>Prověř licenci použitého obsahu a proces, který měl incidentu zabránit nebo omezit jeho dopad.</a:t>
+              <a:t>Prověř licenci použitého obsahu a proces, který měl incidentu zabránit nebo omezit jeho dopad.</a:t>
             </a:r>
           </a:p>
         </p:txBody>
@@ -3150,7 +3150,7 @@
               </a:defRPr>
             </a:pPr>
             <a:r>
-              <a:t>Nejde o rychlý tip. Jde o postup, který lze vysvětlit a zopakovat.</a:t>
+              <a:t>Nejde o rychlý tip. Jde o postup, který lze vysvětlit a zopakovat.</a:t>
             </a:r>
           </a:p>
         </p:txBody>
@@ -3480,7 +3480,7 @@
               </a:defRPr>
             </a:pPr>
             <a:r>
-              <a:t>Incident mediálního klubu.html, Testy A a B.docx, digitální pracovní sešit</a:t>
+              <a:t>Incident mediálního klubu.html, Testy A a B.docx, digitální pracovní sešit</a:t>
             </a:r>
           </a:p>
         </p:txBody>
@@ -3646,7 +3646,7 @@
               </a:defRPr>
             </a:pPr>
             <a:r>
-              <a:t>Najdi problém u účtu, příspěvku, soukromí, důkazů a autorských práv.</a:t>
+              <a:t>Najdi problém u účtu, příspěvku, soukromí, důkazů a autorských práv.</a:t>
             </a:r>
           </a:p>
         </p:txBody>
@@ -3812,7 +3812,7 @@
               </a:defRPr>
             </a:pPr>
             <a:r>
-              <a:t>Začni omezením škody a obnovením kontroly. Každému kroku přiřaď vlastníka.</a:t>
+              <a:t>Začni omezením škody a obnovením kontroly. Každému kroku přiřaď vlastníka.</a:t>
             </a:r>
           </a:p>
         </p:txBody>
@@ -3978,7 +3978,7 @@
               </a:defRPr>
             </a:pPr>
             <a:r>
-              <a:t>Po odevzdání týmového plánu pracuj bez sešitu a bez pomoci skupiny.</a:t>
+              <a:t>Po odevzdání týmového plánu pracuj bez sešitu a bez pomoci skupiny.</a:t>
             </a:r>
           </a:p>
         </p:txBody>
@@ -4068,7 +4068,7 @@
               </a:defRPr>
             </a:pPr>
             <a:r>
-              <a:t>Týmový akční plán k incidentu, individuální test a závěrečné sebehodnocení.</a:t>
+              <a:t>Týmový akční plán k incidentu, individuální test a závěrečné sebehodnocení.</a:t>
             </a:r>
           </a:p>
         </p:txBody>
@@ -4474,7 +4474,7 @@
               </a:defRPr>
             </a:pPr>
             <a:r>
-              <a:t>Tým nejprve omezí škodu a zabezpečí účty; jednotlivec v testu získá podle zvolené hranice alespoň 45 %.</a:t>
+              <a:t>Tým nejprve omezí škodu a zabezpečí účty; jednotlivec v testu získá podle zvolené hranice alespoň 45 %.</a:t>
             </a:r>
           </a:p>
         </p:txBody>
@@ -4806,7 +4806,7 @@
               </a:defRPr>
             </a:pPr>
             <a:r>
-              <a:t>Které důkazy je vhodné uchovat a které citlivé údaje nesmíme dále šířit?</a:t>
+              <a:t>Které důkazy je vhodné uchovat a které citlivé údaje nesmíme dále šířit?</a:t>
             </a:r>
           </a:p>
         </p:txBody>
@@ -4972,7 +4972,7 @@
               </a:defRPr>
             </a:pPr>
             <a:r>
-              <a:t>Jaká změna procesu zabrání opakování, i když člověk znovu udělá chybu?</a:t>
+              <a:t>Jaká změna procesu zabrání opakování, i když člověk znovu udělá chybu?</a:t>
             </a:r>
           </a:p>
         </p:txBody>
@@ -5347,7 +5347,7 @@
               </a:defRPr>
             </a:pPr>
             <a:r>
-              <a:t>Nahlásit incident, omezit přístup, zabezpečit účet a uchovat pouze nezbytné důkazy.</a:t>
+              <a:t>Nahlásit incident, omezit přístup, zabezpečit účet a uchovat pouze nezbytné důkazy.</a:t>
             </a:r>
           </a:p>
         </p:txBody>
@@ -5437,7 +5437,7 @@
               </a:defRPr>
             </a:pPr>
             <a:r>
-              <a:t>Změnit hesla všech služeb se stejným heslem, zrušit neznámé relace, zkontrolovat obnovu a zapnout 2FA.</a:t>
+              <a:t>Změnit hesla všech služeb se stejným heslem, zrušit neznámé relace, zkontrolovat obnovu a zapnout 2FA.</a:t>
             </a:r>
           </a:p>
         </p:txBody>
@@ -5527,7 +5527,7 @@
               </a:defRPr>
             </a:pPr>
             <a:r>
-              <a:t>Ověřit tvrzení, odstranit nebo opravit nepravdivý obsah, transparentně informovat publikum a uchovat záznam.</a:t>
+              <a:t>Ověřit tvrzení, odstranit nebo opravit nepravdivý obsah, transparentně informovat publikum a uchovat záznam.</a:t>
             </a:r>
           </a:p>
         </p:txBody>
@@ -5693,7 +5693,7 @@
               </a:defRPr>
             </a:pPr>
             <a:r>
-              <a:t>Nejdřív zastavte další škodu a obnovte kontrolu nad účtem.</a:t>
+              <a:t>Nejdřív zastavte další škodu a obnovte kontrolu nad účtem.</a:t>
             </a:r>
           </a:p>
         </p:txBody>
@@ -5738,7 +5738,7 @@
               </a:defRPr>
             </a:pPr>
             <a:r>
-              <a:t>Vrať se k úvodnímu rozhodnutí. Co bys teď změnil — a proč?</a:t>
+              <a:t>Vrať se k úvodnímu rozhodnutí. Co bys teď změnil — a proč?</a:t>
             </a:r>
           </a:p>
         </p:txBody>
@@ -5933,7 +5933,7 @@
               </a:defRPr>
             </a:pPr>
             <a:r>
-              <a:t>Napiš jednu změnu procesu, která sníží dopad budoucí lidské chyby, a jedno téma, které si potřebuješ procvičit.</a:t>
+              <a:t>Napiš jednu změnu procesu, která sníží dopad budoucí lidské chyby, a jedno téma, které si potřebuješ procvičit.</a:t>
             </a:r>
           </a:p>
         </p:txBody>
